--- a/EpsonReport/recursos/ppt/epson-day.pptx
+++ b/EpsonReport/recursos/ppt/epson-day.pptx
@@ -3904,20 +3904,9 @@
   <p:cSld>
     <p:bg>
       <p:bgPr>
-        <a:blipFill dpi="0" rotWithShape="1">
-          <a:blip r:embed="rId2" cstate="screen">
-            <a:lum/>
-            <a:extLst>
-              <a:ext uri="{28A0092B-C50C-407E-A947-70E740481C1C}">
-                <a14:useLocalDpi xmlns:a14="http://schemas.microsoft.com/office/drawing/2010/main"/>
-              </a:ext>
-            </a:extLst>
-          </a:blip>
-          <a:srcRect/>
-          <a:stretch>
-            <a:fillRect/>
-          </a:stretch>
-        </a:blipFill>
+        <a:solidFill>
+          <a:schemeClr val="bg1"/>
+        </a:solidFill>
         <a:effectLst/>
       </p:bgPr>
     </p:bg>
@@ -3935,6 +3924,38 @@
           <a:chExt cx="0" cy="0"/>
         </a:xfrm>
       </p:grpSpPr>
+      <p:pic>
+        <p:nvPicPr>
+          <p:cNvPr id="40" name="Gráfico logo">
+            <a:extLst/>
+          </p:cNvPr>
+          <p:cNvPicPr>
+            <a:picLocks noChangeAspect="1"/>
+          </p:cNvPicPr>
+          <p:nvPr/>
+        </p:nvPicPr>
+        <p:blipFill>
+          <a:blip>
+            <a:extLst>
+              <a:ext uri="{96DAC541-7B7A-43D3-8B79-37D633B846F1}">
+                <asvg:svgBlip xmlns:asvg="http://schemas.microsoft.com/office/drawing/2016/SVG/main" r:embed="rId3"/>
+              </a:ext>
+            </a:extLst>
+          </a:blip>
+          <a:stretch>
+            <a:fillRect/>
+          </a:stretch>
+        </p:blipFill>
+        <p:spPr>
+          <a:xfrm>
+            <a:off x="4035538" y="2703969"/>
+            <a:ext cx="4120924" cy="1450061"/>
+          </a:xfrm>
+          <a:prstGeom prst="rect">
+            <a:avLst/>
+          </a:prstGeom>
+        </p:spPr>
+      </p:pic>
       <p:sp>
         <p:nvSpPr>
           <p:cNvPr id="2" name="Subtítulo 2">
@@ -3951,8 +3972,8 @@
         </p:nvSpPr>
         <p:spPr>
           <a:xfrm>
-            <a:off x="1281198" y="4350283"/>
-            <a:ext cx="2945362" cy="737181"/>
+            <a:off x="4035538" y="4350283"/>
+            <a:ext cx="4120924" cy="737181"/>
           </a:xfrm>
           <a:prstGeom prst="rect">
             <a:avLst/>

--- a/EpsonReport/recursos/ppt/epson-day.pptx
+++ b/EpsonReport/recursos/ppt/epson-day.pptx
@@ -732,7 +732,7 @@
           <a:p>
             <a:fld id="{8A8A541F-D289-455E-8D71-1F24AAE12B38}" type="datetimeFigureOut">
               <a:rPr lang="es-EC" smtClean="0"/>
-              <a:t>29/6/2026</a:t>
+              <a:t>3/10/2026</a:t>
             </a:fld>
             <a:endParaRPr lang="es-EC"/>
           </a:p>
@@ -951,7 +951,7 @@
           <a:p>
             <a:fld id="{8A8A541F-D289-455E-8D71-1F24AAE12B38}" type="datetimeFigureOut">
               <a:rPr lang="es-EC" smtClean="0"/>
-              <a:t>29/6/2026</a:t>
+              <a:t>3/10/2026</a:t>
             </a:fld>
             <a:endParaRPr lang="es-EC"/>
           </a:p>
@@ -1180,7 +1180,7 @@
           <a:p>
             <a:fld id="{8A8A541F-D289-455E-8D71-1F24AAE12B38}" type="datetimeFigureOut">
               <a:rPr lang="es-EC" smtClean="0"/>
-              <a:t>29/6/2026</a:t>
+              <a:t>3/10/2026</a:t>
             </a:fld>
             <a:endParaRPr lang="es-EC"/>
           </a:p>
@@ -1524,7 +1524,7 @@
           <a:p>
             <a:fld id="{8A8A541F-D289-455E-8D71-1F24AAE12B38}" type="datetimeFigureOut">
               <a:rPr lang="es-EC" smtClean="0"/>
-              <a:t>29/6/2026</a:t>
+              <a:t>3/10/2026</a:t>
             </a:fld>
             <a:endParaRPr lang="es-EC"/>
           </a:p>
@@ -1811,7 +1811,7 @@
           <a:p>
             <a:fld id="{8A8A541F-D289-455E-8D71-1F24AAE12B38}" type="datetimeFigureOut">
               <a:rPr lang="es-EC" smtClean="0"/>
-              <a:t>29/6/2026</a:t>
+              <a:t>3/10/2026</a:t>
             </a:fld>
             <a:endParaRPr lang="es-EC"/>
           </a:p>
@@ -2245,7 +2245,7 @@
           <a:p>
             <a:fld id="{8A8A541F-D289-455E-8D71-1F24AAE12B38}" type="datetimeFigureOut">
               <a:rPr lang="es-EC" smtClean="0"/>
-              <a:t>29/6/2026</a:t>
+              <a:t>3/10/2026</a:t>
             </a:fld>
             <a:endParaRPr lang="es-EC"/>
           </a:p>
@@ -2406,7 +2406,7 @@
           <a:p>
             <a:fld id="{8A8A541F-D289-455E-8D71-1F24AAE12B38}" type="datetimeFigureOut">
               <a:rPr lang="es-EC" smtClean="0"/>
-              <a:t>29/6/2026</a:t>
+              <a:t>3/10/2026</a:t>
             </a:fld>
             <a:endParaRPr lang="es-EC"/>
           </a:p>
@@ -2538,7 +2538,7 @@
           <a:p>
             <a:fld id="{8A8A541F-D289-455E-8D71-1F24AAE12B38}" type="datetimeFigureOut">
               <a:rPr lang="es-EC" smtClean="0"/>
-              <a:t>29/6/2026</a:t>
+              <a:t>3/10/2026</a:t>
             </a:fld>
             <a:endParaRPr lang="es-EC"/>
           </a:p>
@@ -2870,7 +2870,7 @@
           <a:p>
             <a:fld id="{8A8A541F-D289-455E-8D71-1F24AAE12B38}" type="datetimeFigureOut">
               <a:rPr lang="es-EC" smtClean="0"/>
-              <a:t>29/6/2026</a:t>
+              <a:t>3/10/2026</a:t>
             </a:fld>
             <a:endParaRPr lang="es-EC"/>
           </a:p>
@@ -3182,7 +3182,7 @@
           <a:p>
             <a:fld id="{8A8A541F-D289-455E-8D71-1F24AAE12B38}" type="datetimeFigureOut">
               <a:rPr lang="es-EC" smtClean="0"/>
-              <a:t>29/6/2026</a:t>
+              <a:t>3/10/2026</a:t>
             </a:fld>
             <a:endParaRPr lang="es-EC"/>
           </a:p>
@@ -3425,7 +3425,7 @@
           <a:p>
             <a:fld id="{8A8A541F-D289-455E-8D71-1F24AAE12B38}" type="datetimeFigureOut">
               <a:rPr lang="es-EC" smtClean="0"/>
-              <a:t>29/6/2026</a:t>
+              <a:t>3/10/2026</a:t>
             </a:fld>
             <a:endParaRPr lang="es-EC"/>
           </a:p>
@@ -3924,38 +3924,6 @@
           <a:chExt cx="0" cy="0"/>
         </a:xfrm>
       </p:grpSpPr>
-      <p:pic>
-        <p:nvPicPr>
-          <p:cNvPr id="40" name="Gráfico logo">
-            <a:extLst/>
-          </p:cNvPr>
-          <p:cNvPicPr>
-            <a:picLocks noChangeAspect="1"/>
-          </p:cNvPicPr>
-          <p:nvPr/>
-        </p:nvPicPr>
-        <p:blipFill>
-          <a:blip>
-            <a:extLst>
-              <a:ext uri="{96DAC541-7B7A-43D3-8B79-37D633B846F1}">
-                <asvg:svgBlip xmlns:asvg="http://schemas.microsoft.com/office/drawing/2016/SVG/main" r:embed="rId3"/>
-              </a:ext>
-            </a:extLst>
-          </a:blip>
-          <a:stretch>
-            <a:fillRect/>
-          </a:stretch>
-        </p:blipFill>
-        <p:spPr>
-          <a:xfrm>
-            <a:off x="4035538" y="2703969"/>
-            <a:ext cx="4120924" cy="1450061"/>
-          </a:xfrm>
-          <a:prstGeom prst="rect">
-            <a:avLst/>
-          </a:prstGeom>
-        </p:spPr>
-      </p:pic>
       <p:sp>
         <p:nvSpPr>
           <p:cNvPr id="2" name="Subtítulo 2">
@@ -4205,6 +4173,81 @@
           </a:p>
         </p:txBody>
       </p:sp>
+      <p:pic>
+        <p:nvPicPr>
+          <p:cNvPr id="3" name="Imagen 2" descr="Epson-Logo – Specialised Imaging Solutions Limited">
+            <a:extLst>
+              <a:ext uri="{FF2B5EF4-FFF2-40B4-BE49-F238E27FC236}">
+                <a16:creationId xmlns:a16="http://schemas.microsoft.com/office/drawing/2014/main" id="{40E04C4A-D33A-71EA-93FB-A6F549C75A0B}"/>
+              </a:ext>
+            </a:extLst>
+          </p:cNvPr>
+          <p:cNvPicPr>
+            <a:picLocks noChangeAspect="1"/>
+          </p:cNvPicPr>
+          <p:nvPr/>
+        </p:nvPicPr>
+        <p:blipFill>
+          <a:blip r:embed="rId2"/>
+          <a:srcRect t="23469" r="314" b="27720"/>
+          <a:stretch>
+            <a:fillRect/>
+          </a:stretch>
+        </p:blipFill>
+        <p:spPr>
+          <a:xfrm>
+            <a:off x="3842079" y="2413165"/>
+            <a:ext cx="4507842" cy="1238568"/>
+          </a:xfrm>
+          <a:prstGeom prst="rect">
+            <a:avLst/>
+          </a:prstGeom>
+        </p:spPr>
+      </p:pic>
+      <p:cxnSp>
+        <p:nvCxnSpPr>
+          <p:cNvPr id="4" name="Conector recto 3">
+            <a:extLst>
+              <a:ext uri="{FF2B5EF4-FFF2-40B4-BE49-F238E27FC236}">
+                <a16:creationId xmlns:a16="http://schemas.microsoft.com/office/drawing/2014/main" id="{6226F2E8-ED90-CC43-D3A1-32E18F297FA6}"/>
+              </a:ext>
+            </a:extLst>
+          </p:cNvPr>
+          <p:cNvCxnSpPr/>
+          <p:nvPr/>
+        </p:nvCxnSpPr>
+        <p:spPr>
+          <a:xfrm>
+            <a:off x="4256297" y="3825551"/>
+            <a:ext cx="3486778" cy="0"/>
+          </a:xfrm>
+          <a:prstGeom prst="line">
+            <a:avLst/>
+          </a:prstGeom>
+          <a:ln w="57150">
+            <a:solidFill>
+              <a:schemeClr val="accent1">
+                <a:lumMod val="20000"/>
+                <a:lumOff val="80000"/>
+              </a:schemeClr>
+            </a:solidFill>
+          </a:ln>
+        </p:spPr>
+        <p:style>
+          <a:lnRef idx="2">
+            <a:schemeClr val="accent5"/>
+          </a:lnRef>
+          <a:fillRef idx="0">
+            <a:schemeClr val="accent5"/>
+          </a:fillRef>
+          <a:effectRef idx="1">
+            <a:schemeClr val="accent5"/>
+          </a:effectRef>
+          <a:fontRef idx="minor">
+            <a:schemeClr val="tx1"/>
+          </a:fontRef>
+        </p:style>
+      </p:cxnSp>
     </p:spTree>
     <p:extLst>
       <p:ext uri="{BB962C8B-B14F-4D97-AF65-F5344CB8AC3E}">
